--- a/docs/SpotU_Presentacion.pptx
+++ b/docs/SpotU_Presentacion.pptx
@@ -8640,7 +8640,7 @@
                 <a:ea typeface="Calibri" pitchFamily="34" charset="-122"/>
                 <a:cs typeface="Calibri" pitchFamily="34" charset="-120"/>
               </a:rPr>
-              <a:t>1ra publicacion: 30 dias gratis  ·  Pioneros (primeros 100 usuarios): 1 ano completamente gratis</a:t>
+              <a:t>1ra publicacion: 30 dias gratis  ·  Pioneros (primeros 250 usuarios): 1 ano completamente gratis</a:t>
             </a:r>
             <a:endParaRPr lang="en-US" sz="1200" dirty="0"/>
           </a:p>
